--- a/docs/AI写作助手项目介绍.pptx
+++ b/docs/AI写作助手项目介绍.pptx
@@ -3400,8 +3400,8 @@
         </p:nvSpPr>
         <p:spPr>
           <a:xfrm>
-            <a:off x="731520" y="1645920"/>
-            <a:ext cx="3383280" cy="1188720"/>
+            <a:off x="731520" y="1463040"/>
+            <a:ext cx="3383280" cy="1097280"/>
           </a:xfrm>
           <a:prstGeom prst="roundRect">
             <a:avLst/>
@@ -3445,7 +3445,7 @@
         </p:nvSpPr>
         <p:spPr>
           <a:xfrm>
-            <a:off x="914400" y="1737360"/>
+            <a:off x="914400" y="1508760"/>
             <a:ext cx="3017520" cy="320040"/>
           </a:xfrm>
           <a:prstGeom prst="rect">
@@ -3481,7 +3481,7 @@
         </p:nvSpPr>
         <p:spPr>
           <a:xfrm>
-            <a:off x="914400" y="2057400"/>
+            <a:off x="914400" y="1828800"/>
             <a:ext cx="3017520" cy="274320"/>
           </a:xfrm>
           <a:prstGeom prst="rect">
@@ -3517,7 +3517,7 @@
         </p:nvSpPr>
         <p:spPr>
           <a:xfrm>
-            <a:off x="914400" y="2377440"/>
+            <a:off x="914400" y="2103120"/>
             <a:ext cx="3017520" cy="320040"/>
           </a:xfrm>
           <a:prstGeom prst="rect">
@@ -3553,8 +3553,8 @@
         </p:nvSpPr>
         <p:spPr>
           <a:xfrm>
-            <a:off x="4480559" y="1645920"/>
-            <a:ext cx="3383280" cy="1188720"/>
+            <a:off x="4480559" y="1463040"/>
+            <a:ext cx="3383280" cy="1097280"/>
           </a:xfrm>
           <a:prstGeom prst="roundRect">
             <a:avLst/>
@@ -3598,7 +3598,7 @@
         </p:nvSpPr>
         <p:spPr>
           <a:xfrm>
-            <a:off x="4663439" y="1737360"/>
+            <a:off x="4663439" y="1508760"/>
             <a:ext cx="3017520" cy="320040"/>
           </a:xfrm>
           <a:prstGeom prst="rect">
@@ -3634,7 +3634,7 @@
         </p:nvSpPr>
         <p:spPr>
           <a:xfrm>
-            <a:off x="4663439" y="2057400"/>
+            <a:off x="4663439" y="1828800"/>
             <a:ext cx="3017520" cy="274320"/>
           </a:xfrm>
           <a:prstGeom prst="rect">
@@ -3670,7 +3670,7 @@
         </p:nvSpPr>
         <p:spPr>
           <a:xfrm>
-            <a:off x="4663439" y="2377440"/>
+            <a:off x="4663439" y="2103120"/>
             <a:ext cx="3017520" cy="320040"/>
           </a:xfrm>
           <a:prstGeom prst="rect">
@@ -3706,8 +3706,8 @@
         </p:nvSpPr>
         <p:spPr>
           <a:xfrm>
-            <a:off x="8229598" y="1645920"/>
-            <a:ext cx="3383280" cy="1188720"/>
+            <a:off x="8229598" y="1463040"/>
+            <a:ext cx="3383280" cy="1097280"/>
           </a:xfrm>
           <a:prstGeom prst="roundRect">
             <a:avLst/>
@@ -3751,7 +3751,7 @@
         </p:nvSpPr>
         <p:spPr>
           <a:xfrm>
-            <a:off x="8412478" y="1737360"/>
+            <a:off x="8412478" y="1508760"/>
             <a:ext cx="3017520" cy="320040"/>
           </a:xfrm>
           <a:prstGeom prst="rect">
@@ -3787,7 +3787,7 @@
         </p:nvSpPr>
         <p:spPr>
           <a:xfrm>
-            <a:off x="8412478" y="2057400"/>
+            <a:off x="8412478" y="1828800"/>
             <a:ext cx="3017520" cy="274320"/>
           </a:xfrm>
           <a:prstGeom prst="rect">
@@ -3823,7 +3823,7 @@
         </p:nvSpPr>
         <p:spPr>
           <a:xfrm>
-            <a:off x="8412478" y="2377440"/>
+            <a:off x="8412478" y="2103120"/>
             <a:ext cx="3017520" cy="320040"/>
           </a:xfrm>
           <a:prstGeom prst="rect">
@@ -3859,8 +3859,8 @@
         </p:nvSpPr>
         <p:spPr>
           <a:xfrm>
-            <a:off x="731520" y="3108960"/>
-            <a:ext cx="3383280" cy="1188720"/>
+            <a:off x="731520" y="2743200"/>
+            <a:ext cx="3383280" cy="1097280"/>
           </a:xfrm>
           <a:prstGeom prst="roundRect">
             <a:avLst/>
@@ -3904,7 +3904,7 @@
         </p:nvSpPr>
         <p:spPr>
           <a:xfrm>
-            <a:off x="914400" y="3200400"/>
+            <a:off x="914400" y="2788920"/>
             <a:ext cx="3017520" cy="320040"/>
           </a:xfrm>
           <a:prstGeom prst="rect">
@@ -3940,7 +3940,7 @@
         </p:nvSpPr>
         <p:spPr>
           <a:xfrm>
-            <a:off x="914400" y="3520440"/>
+            <a:off x="914400" y="3108960"/>
             <a:ext cx="3017520" cy="274320"/>
           </a:xfrm>
           <a:prstGeom prst="rect">
@@ -3976,7 +3976,7 @@
         </p:nvSpPr>
         <p:spPr>
           <a:xfrm>
-            <a:off x="914400" y="3840480"/>
+            <a:off x="914400" y="3383280"/>
             <a:ext cx="3017520" cy="320040"/>
           </a:xfrm>
           <a:prstGeom prst="rect">
@@ -4012,8 +4012,8 @@
         </p:nvSpPr>
         <p:spPr>
           <a:xfrm>
-            <a:off x="4480559" y="3108960"/>
-            <a:ext cx="3383280" cy="1188720"/>
+            <a:off x="4480559" y="2743200"/>
+            <a:ext cx="3383280" cy="1097280"/>
           </a:xfrm>
           <a:prstGeom prst="roundRect">
             <a:avLst/>
@@ -4057,7 +4057,7 @@
         </p:nvSpPr>
         <p:spPr>
           <a:xfrm>
-            <a:off x="4663439" y="3200400"/>
+            <a:off x="4663439" y="2788920"/>
             <a:ext cx="3017520" cy="320040"/>
           </a:xfrm>
           <a:prstGeom prst="rect">
@@ -4093,7 +4093,7 @@
         </p:nvSpPr>
         <p:spPr>
           <a:xfrm>
-            <a:off x="4663439" y="3520440"/>
+            <a:off x="4663439" y="3108960"/>
             <a:ext cx="3017520" cy="274320"/>
           </a:xfrm>
           <a:prstGeom prst="rect">
@@ -4129,7 +4129,7 @@
         </p:nvSpPr>
         <p:spPr>
           <a:xfrm>
-            <a:off x="4663439" y="3840480"/>
+            <a:off x="4663439" y="3383280"/>
             <a:ext cx="3017520" cy="320040"/>
           </a:xfrm>
           <a:prstGeom prst="rect">
@@ -4165,8 +4165,8 @@
         </p:nvSpPr>
         <p:spPr>
           <a:xfrm>
-            <a:off x="8229598" y="3108960"/>
-            <a:ext cx="3383280" cy="1188720"/>
+            <a:off x="8229598" y="2743200"/>
+            <a:ext cx="3383280" cy="1097280"/>
           </a:xfrm>
           <a:prstGeom prst="roundRect">
             <a:avLst/>
@@ -4210,7 +4210,7 @@
         </p:nvSpPr>
         <p:spPr>
           <a:xfrm>
-            <a:off x="8412478" y="3200400"/>
+            <a:off x="8412478" y="2788920"/>
             <a:ext cx="3017520" cy="320040"/>
           </a:xfrm>
           <a:prstGeom prst="rect">
@@ -4233,7 +4233,7 @@
               </a:defRPr>
             </a:pPr>
             <a:r>
-              <a:t>小红书</a:t>
+              <a:t>上海高考作文</a:t>
             </a:r>
           </a:p>
         </p:txBody>
@@ -4246,7 +4246,7 @@
         </p:nvSpPr>
         <p:spPr>
           <a:xfrm>
-            <a:off x="8412478" y="3520440"/>
+            <a:off x="8412478" y="3108960"/>
             <a:ext cx="3017520" cy="274320"/>
           </a:xfrm>
           <a:prstGeom prst="rect">
@@ -4269,7 +4269,7 @@
               </a:defRPr>
             </a:pPr>
             <a:r>
-              <a:t>XIAOHONGSHU_PROMPT</a:t>
+              <a:t>SH_GAOKAO_PROMPT</a:t>
             </a:r>
           </a:p>
         </p:txBody>
@@ -4282,7 +4282,7 @@
         </p:nvSpPr>
         <p:spPr>
           <a:xfrm>
-            <a:off x="8412478" y="3840480"/>
+            <a:off x="8412478" y="3383280"/>
             <a:ext cx="3017520" cy="320040"/>
           </a:xfrm>
           <a:prstGeom prst="rect">
@@ -4305,7 +4305,7 @@
               </a:defRPr>
             </a:pPr>
             <a:r>
-              <a:t>emoji标题+口语化</a:t>
+              <a:t>800字议论文+思辨</a:t>
             </a:r>
           </a:p>
         </p:txBody>
@@ -4318,8 +4318,8 @@
         </p:nvSpPr>
         <p:spPr>
           <a:xfrm>
-            <a:off x="731520" y="4572000"/>
-            <a:ext cx="3383280" cy="1188720"/>
+            <a:off x="731520" y="4023360"/>
+            <a:ext cx="3383280" cy="1097280"/>
           </a:xfrm>
           <a:prstGeom prst="roundRect">
             <a:avLst/>
@@ -4363,6 +4363,78 @@
         </p:nvSpPr>
         <p:spPr>
           <a:xfrm>
+            <a:off x="914400" y="4069080"/>
+            <a:ext cx="3017520" cy="320040"/>
+          </a:xfrm>
+          <a:prstGeom prst="rect">
+            <a:avLst/>
+          </a:prstGeom>
+          <a:noFill/>
+        </p:spPr>
+        <p:txBody>
+          <a:bodyPr wrap="square">
+            <a:spAutoFit/>
+          </a:bodyPr>
+          <a:lstStyle/>
+          <a:p>
+            <a:pPr algn="l">
+              <a:defRPr sz="1600" b="1">
+                <a:solidFill>
+                  <a:srgbClr val="4ADE80"/>
+                </a:solidFill>
+                <a:latin typeface="Microsoft YaHei"/>
+              </a:defRPr>
+            </a:pPr>
+            <a:r>
+              <a:t>小红书</a:t>
+            </a:r>
+          </a:p>
+        </p:txBody>
+      </p:sp>
+      <p:sp>
+        <p:nvSpPr>
+          <p:cNvPr id="31" name="TextBox 30"/>
+          <p:cNvSpPr txBox="1"/>
+          <p:nvPr/>
+        </p:nvSpPr>
+        <p:spPr>
+          <a:xfrm>
+            <a:off x="914400" y="4389120"/>
+            <a:ext cx="3017520" cy="274320"/>
+          </a:xfrm>
+          <a:prstGeom prst="rect">
+            <a:avLst/>
+          </a:prstGeom>
+          <a:noFill/>
+        </p:spPr>
+        <p:txBody>
+          <a:bodyPr wrap="square">
+            <a:spAutoFit/>
+          </a:bodyPr>
+          <a:lstStyle/>
+          <a:p>
+            <a:pPr algn="l">
+              <a:defRPr sz="1100" b="0">
+                <a:solidFill>
+                  <a:srgbClr val="78788C"/>
+                </a:solidFill>
+                <a:latin typeface="Consolas"/>
+              </a:defRPr>
+            </a:pPr>
+            <a:r>
+              <a:t>XIAOHONGSHU_PROMPT</a:t>
+            </a:r>
+          </a:p>
+        </p:txBody>
+      </p:sp>
+      <p:sp>
+        <p:nvSpPr>
+          <p:cNvPr id="32" name="TextBox 31"/>
+          <p:cNvSpPr txBox="1"/>
+          <p:nvPr/>
+        </p:nvSpPr>
+        <p:spPr>
+          <a:xfrm>
             <a:off x="914400" y="4663440"/>
             <a:ext cx="3017520" cy="320040"/>
           </a:xfrm>
@@ -4378,78 +4450,6 @@
           <a:lstStyle/>
           <a:p>
             <a:pPr algn="l">
-              <a:defRPr sz="1600" b="1">
-                <a:solidFill>
-                  <a:srgbClr val="4ADE80"/>
-                </a:solidFill>
-                <a:latin typeface="Microsoft YaHei"/>
-              </a:defRPr>
-            </a:pPr>
-            <a:r>
-              <a:t>公众号</a:t>
-            </a:r>
-          </a:p>
-        </p:txBody>
-      </p:sp>
-      <p:sp>
-        <p:nvSpPr>
-          <p:cNvPr id="31" name="TextBox 30"/>
-          <p:cNvSpPr txBox="1"/>
-          <p:nvPr/>
-        </p:nvSpPr>
-        <p:spPr>
-          <a:xfrm>
-            <a:off x="914400" y="4983480"/>
-            <a:ext cx="3017520" cy="274320"/>
-          </a:xfrm>
-          <a:prstGeom prst="rect">
-            <a:avLst/>
-          </a:prstGeom>
-          <a:noFill/>
-        </p:spPr>
-        <p:txBody>
-          <a:bodyPr wrap="square">
-            <a:spAutoFit/>
-          </a:bodyPr>
-          <a:lstStyle/>
-          <a:p>
-            <a:pPr algn="l">
-              <a:defRPr sz="1100" b="0">
-                <a:solidFill>
-                  <a:srgbClr val="78788C"/>
-                </a:solidFill>
-                <a:latin typeface="Consolas"/>
-              </a:defRPr>
-            </a:pPr>
-            <a:r>
-              <a:t>GONGZHONGHAO_PROMPT</a:t>
-            </a:r>
-          </a:p>
-        </p:txBody>
-      </p:sp>
-      <p:sp>
-        <p:nvSpPr>
-          <p:cNvPr id="32" name="TextBox 31"/>
-          <p:cNvSpPr txBox="1"/>
-          <p:nvPr/>
-        </p:nvSpPr>
-        <p:spPr>
-          <a:xfrm>
-            <a:off x="914400" y="5303520"/>
-            <a:ext cx="3017520" cy="320040"/>
-          </a:xfrm>
-          <a:prstGeom prst="rect">
-            <a:avLst/>
-          </a:prstGeom>
-          <a:noFill/>
-        </p:spPr>
-        <p:txBody>
-          <a:bodyPr wrap="square">
-            <a:spAutoFit/>
-          </a:bodyPr>
-          <a:lstStyle/>
-          <a:p>
-            <a:pPr algn="l">
               <a:defRPr sz="1300" b="0">
                 <a:solidFill>
                   <a:srgbClr val="B4B4C3"/>
@@ -4458,7 +4458,7 @@
               </a:defRPr>
             </a:pPr>
             <a:r>
-              <a:t>故事切入+金句加粗</a:t>
+              <a:t>emoji标题+口语化</a:t>
             </a:r>
           </a:p>
         </p:txBody>
@@ -4471,8 +4471,8 @@
         </p:nvSpPr>
         <p:spPr>
           <a:xfrm>
-            <a:off x="4480559" y="4572000"/>
-            <a:ext cx="3383280" cy="1188720"/>
+            <a:off x="4480559" y="4023360"/>
+            <a:ext cx="3383280" cy="1097280"/>
           </a:xfrm>
           <a:prstGeom prst="roundRect">
             <a:avLst/>
@@ -4516,6 +4516,78 @@
         </p:nvSpPr>
         <p:spPr>
           <a:xfrm>
+            <a:off x="4663439" y="4069080"/>
+            <a:ext cx="3017520" cy="320040"/>
+          </a:xfrm>
+          <a:prstGeom prst="rect">
+            <a:avLst/>
+          </a:prstGeom>
+          <a:noFill/>
+        </p:spPr>
+        <p:txBody>
+          <a:bodyPr wrap="square">
+            <a:spAutoFit/>
+          </a:bodyPr>
+          <a:lstStyle/>
+          <a:p>
+            <a:pPr algn="l">
+              <a:defRPr sz="1600" b="1">
+                <a:solidFill>
+                  <a:srgbClr val="FBBF24"/>
+                </a:solidFill>
+                <a:latin typeface="Microsoft YaHei"/>
+              </a:defRPr>
+            </a:pPr>
+            <a:r>
+              <a:t>公众号</a:t>
+            </a:r>
+          </a:p>
+        </p:txBody>
+      </p:sp>
+      <p:sp>
+        <p:nvSpPr>
+          <p:cNvPr id="35" name="TextBox 34"/>
+          <p:cNvSpPr txBox="1"/>
+          <p:nvPr/>
+        </p:nvSpPr>
+        <p:spPr>
+          <a:xfrm>
+            <a:off x="4663439" y="4389120"/>
+            <a:ext cx="3017520" cy="274320"/>
+          </a:xfrm>
+          <a:prstGeom prst="rect">
+            <a:avLst/>
+          </a:prstGeom>
+          <a:noFill/>
+        </p:spPr>
+        <p:txBody>
+          <a:bodyPr wrap="square">
+            <a:spAutoFit/>
+          </a:bodyPr>
+          <a:lstStyle/>
+          <a:p>
+            <a:pPr algn="l">
+              <a:defRPr sz="1100" b="0">
+                <a:solidFill>
+                  <a:srgbClr val="78788C"/>
+                </a:solidFill>
+                <a:latin typeface="Consolas"/>
+              </a:defRPr>
+            </a:pPr>
+            <a:r>
+              <a:t>GONGZHONGHAO_PROMPT</a:t>
+            </a:r>
+          </a:p>
+        </p:txBody>
+      </p:sp>
+      <p:sp>
+        <p:nvSpPr>
+          <p:cNvPr id="36" name="TextBox 35"/>
+          <p:cNvSpPr txBox="1"/>
+          <p:nvPr/>
+        </p:nvSpPr>
+        <p:spPr>
+          <a:xfrm>
             <a:off x="4663439" y="4663440"/>
             <a:ext cx="3017520" cy="320040"/>
           </a:xfrm>
@@ -4531,78 +4603,6 @@
           <a:lstStyle/>
           <a:p>
             <a:pPr algn="l">
-              <a:defRPr sz="1600" b="1">
-                <a:solidFill>
-                  <a:srgbClr val="FBBF24"/>
-                </a:solidFill>
-                <a:latin typeface="Microsoft YaHei"/>
-              </a:defRPr>
-            </a:pPr>
-            <a:r>
-              <a:t>头条</a:t>
-            </a:r>
-          </a:p>
-        </p:txBody>
-      </p:sp>
-      <p:sp>
-        <p:nvSpPr>
-          <p:cNvPr id="35" name="TextBox 34"/>
-          <p:cNvSpPr txBox="1"/>
-          <p:nvPr/>
-        </p:nvSpPr>
-        <p:spPr>
-          <a:xfrm>
-            <a:off x="4663439" y="4983480"/>
-            <a:ext cx="3017520" cy="274320"/>
-          </a:xfrm>
-          <a:prstGeom prst="rect">
-            <a:avLst/>
-          </a:prstGeom>
-          <a:noFill/>
-        </p:spPr>
-        <p:txBody>
-          <a:bodyPr wrap="square">
-            <a:spAutoFit/>
-          </a:bodyPr>
-          <a:lstStyle/>
-          <a:p>
-            <a:pPr algn="l">
-              <a:defRPr sz="1100" b="0">
-                <a:solidFill>
-                  <a:srgbClr val="78788C"/>
-                </a:solidFill>
-                <a:latin typeface="Consolas"/>
-              </a:defRPr>
-            </a:pPr>
-            <a:r>
-              <a:t>TOUTIAO_PROMPT</a:t>
-            </a:r>
-          </a:p>
-        </p:txBody>
-      </p:sp>
-      <p:sp>
-        <p:nvSpPr>
-          <p:cNvPr id="36" name="TextBox 35"/>
-          <p:cNvSpPr txBox="1"/>
-          <p:nvPr/>
-        </p:nvSpPr>
-        <p:spPr>
-          <a:xfrm>
-            <a:off x="4663439" y="5303520"/>
-            <a:ext cx="3017520" cy="320040"/>
-          </a:xfrm>
-          <a:prstGeom prst="rect">
-            <a:avLst/>
-          </a:prstGeom>
-          <a:noFill/>
-        </p:spPr>
-        <p:txBody>
-          <a:bodyPr wrap="square">
-            <a:spAutoFit/>
-          </a:bodyPr>
-          <a:lstStyle/>
-          <a:p>
-            <a:pPr algn="l">
               <a:defRPr sz="1300" b="0">
                 <a:solidFill>
                   <a:srgbClr val="B4B4C3"/>
@@ -4611,7 +4611,7 @@
               </a:defRPr>
             </a:pPr>
             <a:r>
-              <a:t>悬念标题+短段落</a:t>
+              <a:t>故事切入+金句加粗</a:t>
             </a:r>
           </a:p>
         </p:txBody>
@@ -4624,8 +4624,8 @@
         </p:nvSpPr>
         <p:spPr>
           <a:xfrm>
-            <a:off x="8229598" y="4572000"/>
-            <a:ext cx="3383280" cy="1188720"/>
+            <a:off x="8229598" y="4023360"/>
+            <a:ext cx="3383280" cy="1097280"/>
           </a:xfrm>
           <a:prstGeom prst="roundRect">
             <a:avLst/>
@@ -4669,6 +4669,78 @@
         </p:nvSpPr>
         <p:spPr>
           <a:xfrm>
+            <a:off x="8412478" y="4069080"/>
+            <a:ext cx="3017520" cy="320040"/>
+          </a:xfrm>
+          <a:prstGeom prst="rect">
+            <a:avLst/>
+          </a:prstGeom>
+          <a:noFill/>
+        </p:spPr>
+        <p:txBody>
+          <a:bodyPr wrap="square">
+            <a:spAutoFit/>
+          </a:bodyPr>
+          <a:lstStyle/>
+          <a:p>
+            <a:pPr algn="l">
+              <a:defRPr sz="1600" b="1">
+                <a:solidFill>
+                  <a:srgbClr val="A78BFA"/>
+                </a:solidFill>
+                <a:latin typeface="Microsoft YaHei"/>
+              </a:defRPr>
+            </a:pPr>
+            <a:r>
+              <a:t>头条</a:t>
+            </a:r>
+          </a:p>
+        </p:txBody>
+      </p:sp>
+      <p:sp>
+        <p:nvSpPr>
+          <p:cNvPr id="39" name="TextBox 38"/>
+          <p:cNvSpPr txBox="1"/>
+          <p:nvPr/>
+        </p:nvSpPr>
+        <p:spPr>
+          <a:xfrm>
+            <a:off x="8412478" y="4389120"/>
+            <a:ext cx="3017520" cy="274320"/>
+          </a:xfrm>
+          <a:prstGeom prst="rect">
+            <a:avLst/>
+          </a:prstGeom>
+          <a:noFill/>
+        </p:spPr>
+        <p:txBody>
+          <a:bodyPr wrap="square">
+            <a:spAutoFit/>
+          </a:bodyPr>
+          <a:lstStyle/>
+          <a:p>
+            <a:pPr algn="l">
+              <a:defRPr sz="1100" b="0">
+                <a:solidFill>
+                  <a:srgbClr val="78788C"/>
+                </a:solidFill>
+                <a:latin typeface="Consolas"/>
+              </a:defRPr>
+            </a:pPr>
+            <a:r>
+              <a:t>TOUTIAO_PROMPT</a:t>
+            </a:r>
+          </a:p>
+        </p:txBody>
+      </p:sp>
+      <p:sp>
+        <p:nvSpPr>
+          <p:cNvPr id="40" name="TextBox 39"/>
+          <p:cNvSpPr txBox="1"/>
+          <p:nvPr/>
+        </p:nvSpPr>
+        <p:spPr>
+          <a:xfrm>
             <a:off x="8412478" y="4663440"/>
             <a:ext cx="3017520" cy="320040"/>
           </a:xfrm>
@@ -4684,9 +4756,90 @@
           <a:lstStyle/>
           <a:p>
             <a:pPr algn="l">
+              <a:defRPr sz="1300" b="0">
+                <a:solidFill>
+                  <a:srgbClr val="B4B4C3"/>
+                </a:solidFill>
+                <a:latin typeface="Microsoft YaHei"/>
+              </a:defRPr>
+            </a:pPr>
+            <a:r>
+              <a:t>悬念标题+短段落</a:t>
+            </a:r>
+          </a:p>
+        </p:txBody>
+      </p:sp>
+      <p:sp>
+        <p:nvSpPr>
+          <p:cNvPr id="41" name="Rounded Rectangle 40"/>
+          <p:cNvSpPr/>
+          <p:nvPr/>
+        </p:nvSpPr>
+        <p:spPr>
+          <a:xfrm>
+            <a:off x="731520" y="5303520"/>
+            <a:ext cx="3383280" cy="1097280"/>
+          </a:xfrm>
+          <a:prstGeom prst="roundRect">
+            <a:avLst/>
+          </a:prstGeom>
+          <a:solidFill>
+            <a:srgbClr val="242436"/>
+          </a:solidFill>
+          <a:ln w="12700">
+            <a:solidFill>
+              <a:srgbClr val="F472B6"/>
+            </a:solidFill>
+          </a:ln>
+        </p:spPr>
+        <p:style>
+          <a:lnRef idx="1">
+            <a:schemeClr val="accent1"/>
+          </a:lnRef>
+          <a:fillRef idx="3">
+            <a:schemeClr val="accent1"/>
+          </a:fillRef>
+          <a:effectRef idx="2">
+            <a:schemeClr val="accent1"/>
+          </a:effectRef>
+          <a:fontRef idx="minor">
+            <a:schemeClr val="lt1"/>
+          </a:fontRef>
+        </p:style>
+        <p:txBody>
+          <a:bodyPr rtlCol="0" anchor="ctr"/>
+          <a:lstStyle/>
+          <a:p>
+            <a:pPr algn="ctr"/>
+          </a:p>
+        </p:txBody>
+      </p:sp>
+      <p:sp>
+        <p:nvSpPr>
+          <p:cNvPr id="42" name="TextBox 41"/>
+          <p:cNvSpPr txBox="1"/>
+          <p:nvPr/>
+        </p:nvSpPr>
+        <p:spPr>
+          <a:xfrm>
+            <a:off x="914400" y="5349240"/>
+            <a:ext cx="3017520" cy="320040"/>
+          </a:xfrm>
+          <a:prstGeom prst="rect">
+            <a:avLst/>
+          </a:prstGeom>
+          <a:noFill/>
+        </p:spPr>
+        <p:txBody>
+          <a:bodyPr wrap="square">
+            <a:spAutoFit/>
+          </a:bodyPr>
+          <a:lstStyle/>
+          <a:p>
+            <a:pPr algn="l">
               <a:defRPr sz="1600" b="1">
                 <a:solidFill>
-                  <a:srgbClr val="A78BFA"/>
+                  <a:srgbClr val="F472B6"/>
                 </a:solidFill>
                 <a:latin typeface="Microsoft YaHei"/>
               </a:defRPr>
@@ -4699,13 +4852,13 @@
       </p:sp>
       <p:sp>
         <p:nvSpPr>
-          <p:cNvPr id="39" name="TextBox 38"/>
-          <p:cNvSpPr txBox="1"/>
-          <p:nvPr/>
-        </p:nvSpPr>
-        <p:spPr>
-          <a:xfrm>
-            <a:off x="8412478" y="4983480"/>
+          <p:cNvPr id="43" name="TextBox 42"/>
+          <p:cNvSpPr txBox="1"/>
+          <p:nvPr/>
+        </p:nvSpPr>
+        <p:spPr>
+          <a:xfrm>
+            <a:off x="914400" y="5669280"/>
             <a:ext cx="3017520" cy="274320"/>
           </a:xfrm>
           <a:prstGeom prst="rect">
@@ -4735,13 +4888,13 @@
       </p:sp>
       <p:sp>
         <p:nvSpPr>
-          <p:cNvPr id="40" name="TextBox 39"/>
-          <p:cNvSpPr txBox="1"/>
-          <p:nvPr/>
-        </p:nvSpPr>
-        <p:spPr>
-          <a:xfrm>
-            <a:off x="8412478" y="5303520"/>
+          <p:cNvPr id="44" name="TextBox 43"/>
+          <p:cNvSpPr txBox="1"/>
+          <p:nvPr/>
+        </p:nvSpPr>
+        <p:spPr>
+          <a:xfrm>
+            <a:off x="914400" y="5943600"/>
             <a:ext cx="3017520" cy="320040"/>
           </a:xfrm>
           <a:prstGeom prst="rect">
@@ -5329,7 +5482,7 @@
               </a:defRPr>
             </a:pPr>
             <a:r>
-              <a:t>历史记录搜索</a:t>
+              <a:t>历史记录管理</a:t>
             </a:r>
           </a:p>
         </p:txBody>
@@ -5365,7 +5518,7 @@
               </a:defRPr>
             </a:pPr>
             <a:r>
-              <a:t>localStorage 持久化 (最多 50 条) → 关键词匹配内容和结果 → 按时间倒序排列 → 一键恢复历史结果</a:t>
+              <a:t>后端 SQLite 持久化 (永久保存) → 关键词搜索内容和结果 → 按时间倒序排列 → 一键恢复历史结果</a:t>
             </a:r>
           </a:p>
         </p:txBody>
@@ -5758,7 +5911,7 @@
               </a:defRPr>
             </a:pPr>
             <a:r>
-              <a:t>9 种提示词模板，从学术到自媒体</a:t>
+              <a:t>10 种提示词模板，从考试到自媒体</a:t>
             </a:r>
           </a:p>
         </p:txBody>
@@ -6239,7 +6392,7 @@
                 </a:solidFill>
                 <a:latin typeface="Microsoft YaHei"/>
               </a:rPr>
-              <a:t>多场景覆盖：8 种写作风格 + 诗词创作</a:t>
+              <a:t>多场景覆盖：7 种写作风格 + 诗词创作</a:t>
             </a:r>
           </a:p>
           <a:p>
@@ -7677,7 +7830,7 @@
                 </a:solidFill>
                 <a:latin typeface="Microsoft YaHei"/>
               </a:rPr>
-              <a:t>localStorage 历史记录</a:t>
+              <a:t>SQLite 历史记录 (后端持久化)</a:t>
             </a:r>
           </a:p>
         </p:txBody>
